--- a/Bankchurn.pptx
+++ b/Bankchurn.pptx
@@ -18147,19 +18147,31 @@
           <a:p>
             <a:r>
               <a:rPr lang="en-US" dirty="0"/>
+              <a:t>Address dissatisfaction among customers with only 1 product or more than 2 products. Consider simplifying complex bundles and improving perceived value.</a:t>
+            </a:r>
+          </a:p>
+          <a:p>
+            <a:r>
+              <a:rPr lang="en-US" dirty="0"/>
               <a:t>Boost Engagement for Single-Product Holders: Proactively offer cross-sell opportunities or value bundles to customers with only one product.</a:t>
             </a:r>
           </a:p>
           <a:p>
             <a:r>
               <a:rPr lang="en-US" dirty="0"/>
-              <a:t>Simplify communication around product benefits to reduce churn among customers holding more than two products.</a:t>
+              <a:t>Use engagement indicators to identify and reward active users.</a:t>
             </a:r>
           </a:p>
           <a:p>
             <a:r>
               <a:rPr lang="en-US" dirty="0"/>
-              <a:t>Don’t Rely on Credit Score or Balance to Predict Churn Since financial indicators like credit score and balance show no strong correlation with churn, use behavioral or engagement metrics instead.</a:t>
+              <a:t>Target inactive customers with reactivation incentives.</a:t>
+            </a:r>
+          </a:p>
+          <a:p>
+            <a:r>
+              <a:rPr lang="en-US" dirty="0"/>
+              <a:t>Customers with multiple products who churn may not perceive value—use satisfaction metrics or exit feedback to refine offerings.</a:t>
             </a:r>
           </a:p>
         </p:txBody>
@@ -20164,11 +20176,11 @@
             </a:r>
             <a:r>
               <a:rPr lang="en-US" b="1" dirty="0"/>
-              <a:t>40 to 70</a:t>
+              <a:t>40 to 70 </a:t>
             </a:r>
             <a:r>
               <a:rPr lang="en-US" dirty="0"/>
-              <a:t>.</a:t>
+              <a:t>making them critical focus segments for retention.</a:t>
             </a:r>
           </a:p>
         </p:txBody>
@@ -20805,7 +20817,7 @@
         <p:spPr>
           <a:xfrm>
             <a:off x="1285875" y="5521108"/>
-            <a:ext cx="6104658" cy="646331"/>
+            <a:ext cx="6104658" cy="1200329"/>
           </a:xfrm>
           <a:prstGeom prst="rect">
             <a:avLst/>
@@ -20824,7 +20836,7 @@
                   <a:srgbClr val="202C8F"/>
                 </a:solidFill>
               </a:rPr>
-              <a:t>Churn is high among customers with only one product. It also rises when customers hold more than two products.</a:t>
+              <a:t>Churn is high among customers with only one product  suggesting low engagement/ dissatisfaction. It also rises when customers hold more than two products possibly due to complexity or lack of perceived value.</a:t>
             </a:r>
           </a:p>
         </p:txBody>
@@ -21407,7 +21419,7 @@
         <p:spPr>
           <a:xfrm>
             <a:off x="1285875" y="5521108"/>
-            <a:ext cx="6104658" cy="646331"/>
+            <a:ext cx="6104658" cy="923330"/>
           </a:xfrm>
           <a:prstGeom prst="rect">
             <a:avLst/>
@@ -21458,7 +21470,7 @@
                   <a:srgbClr val="202C8F"/>
                 </a:solidFill>
               </a:rPr>
-              <a:t>balance does not influence churn.</a:t>
+              <a:t>balance does not influence churn, suggesting retention strategies should not rely on financial metrics alone.</a:t>
             </a:r>
             <a:endParaRPr lang="en-US" dirty="0">
               <a:solidFill>
@@ -21872,8 +21884,8 @@
         </p:nvSpPr>
         <p:spPr>
           <a:xfrm>
-            <a:off x="808758" y="5637859"/>
-            <a:ext cx="8506688" cy="923330"/>
+            <a:off x="808758" y="5455766"/>
+            <a:ext cx="8506688" cy="1200329"/>
           </a:xfrm>
           <a:prstGeom prst="rect">
             <a:avLst/>
@@ -21892,7 +21904,7 @@
                   <a:srgbClr val="202C8F"/>
                 </a:solidFill>
               </a:rPr>
-              <a:t>Among non-churned customers, average balance decreases as the number of products increases. For churned customers, mean balance remains consistent across all product counts.</a:t>
+              <a:t>Non-churned customers, on the other hand, show a decrease in average balance as the number of products increases implying that Non-churned customers with more products are possibly more financially active, using bundled services that reduce their liquid balance (e.g., due to loan repayments or fund transfers).</a:t>
             </a:r>
           </a:p>
         </p:txBody>
@@ -22732,6 +22744,15 @@
 </file>
 
 <file path=customXml/item1.xml><?xml version="1.0" encoding="utf-8"?>
+<?mso-contentType ?>
+<FormTemplates xmlns="http://schemas.microsoft.com/sharepoint/v3/contenttype/forms">
+  <Display>DocumentLibraryForm</Display>
+  <Edit>DocumentLibraryForm</Edit>
+  <New>DocumentLibraryForm</New>
+</FormTemplates>
+</file>
+
+<file path=customXml/item2.xml><?xml version="1.0" encoding="utf-8"?>
 <p:properties xmlns:p="http://schemas.microsoft.com/office/2006/metadata/properties" xmlns:xsi="http://www.w3.org/2001/XMLSchema-instance" xmlns:pc="http://schemas.microsoft.com/office/infopath/2007/PartnerControls">
   <documentManagement>
     <_ip_UnifiedCompliancePolicyUIAction xmlns="http://schemas.microsoft.com/sharepoint/v3" xsi:nil="true"/>
@@ -22749,15 +22770,6 @@
     <MediaServiceKeyPoints xmlns="71af3243-3dd4-4a8d-8c0d-dd76da1f02a5" xsi:nil="true"/>
   </documentManagement>
 </p:properties>
-</file>
-
-<file path=customXml/item2.xml><?xml version="1.0" encoding="utf-8"?>
-<?mso-contentType ?>
-<FormTemplates xmlns="http://schemas.microsoft.com/sharepoint/v3/contenttype/forms">
-  <Display>DocumentLibraryForm</Display>
-  <Edit>DocumentLibraryForm</Edit>
-  <New>DocumentLibraryForm</New>
-</FormTemplates>
 </file>
 
 <file path=customXml/item3.xml><?xml version="1.0" encoding="utf-8"?>
@@ -23073,6 +23085,14 @@
 </file>
 
 <file path=customXml/itemProps1.xml><?xml version="1.0" encoding="utf-8"?>
+<ds:datastoreItem xmlns:ds="http://schemas.openxmlformats.org/officeDocument/2006/customXml" ds:itemID="{16DBB56F-4362-4386-A1A1-3DF898896616}">
+  <ds:schemaRefs>
+    <ds:schemaRef ds:uri="http://schemas.microsoft.com/sharepoint/v3/contenttype/forms"/>
+  </ds:schemaRefs>
+</ds:datastoreItem>
+</file>
+
+<file path=customXml/itemProps2.xml><?xml version="1.0" encoding="utf-8"?>
 <ds:datastoreItem xmlns:ds="http://schemas.openxmlformats.org/officeDocument/2006/customXml" ds:itemID="{BA719FA4-954C-4FA8-82CB-206659C3B826}">
   <ds:schemaRefs>
     <ds:schemaRef ds:uri="http://schemas.microsoft.com/office/2006/metadata/properties"/>
@@ -23080,14 +23100,6 @@
     <ds:schemaRef ds:uri="http://schemas.microsoft.com/sharepoint/v3"/>
     <ds:schemaRef ds:uri="71af3243-3dd4-4a8d-8c0d-dd76da1f02a5"/>
     <ds:schemaRef ds:uri="230e9df3-be65-4c73-a93b-d1236ebd677e"/>
-  </ds:schemaRefs>
-</ds:datastoreItem>
-</file>
-
-<file path=customXml/itemProps2.xml><?xml version="1.0" encoding="utf-8"?>
-<ds:datastoreItem xmlns:ds="http://schemas.openxmlformats.org/officeDocument/2006/customXml" ds:itemID="{16DBB56F-4362-4386-A1A1-3DF898896616}">
-  <ds:schemaRefs>
-    <ds:schemaRef ds:uri="http://schemas.microsoft.com/sharepoint/v3/contenttype/forms"/>
   </ds:schemaRefs>
 </ds:datastoreItem>
 </file>
